--- a/decks/triple-light/triple-light_ch5_magnification.pptx
+++ b/decks/triple-light/triple-light_ch5_magnification.pptx
@@ -124,30 +124,30 @@
   <p:extLst>
     <p:ext uri="{521415D9-36F7-43E2-AB2F-B90AF26B5E84}">
       <p14:sectionLst xmlns:p14="http://schemas.microsoft.com/office/powerpoint/2010/main">
-        <p14:section name="Opening" id="{f4d15699-73dd-b453-7077-078ee5da80f9}">
+        <p14:section name="Opening" id="{36e092ba-130c-19e7-605e-f5b25056a7e4}">
           <p14:sldIdLst>
             <p14:sldId id="256"/>
           </p14:sldIdLst>
         </p14:section>
-        <p14:section name="Gate" id="{23db7116-ac50-6c85-a16f-56bfa6b4ab2f}">
+        <p14:section name="Gate" id="{cc8c5b5f-7d60-d91b-eecb-c98c6fa24cc2}">
           <p14:sldIdLst>
             <p14:sldId id="257"/>
             <p14:sldId id="258"/>
           </p14:sldIdLst>
         </p14:section>
-        <p14:section name="Pre-teach" id="{a7acd9f9-02d9-dfde-be0e-383e1d270209}">
+        <p14:section name="Pre-teach" id="{562d7c73-cdf0-27c8-b497-d993a429cd0a}">
           <p14:sldIdLst>
             <p14:sldId id="259"/>
             <p14:sldId id="260"/>
           </p14:sldIdLst>
         </p14:section>
-        <p14:section name="Read-along" id="{a488a3f5-dbff-620e-9215-8c7673305b60}">
+        <p14:section name="Read-along" id="{adccfe05-d1ae-5b6e-cf86-a653e3ea389d}">
           <p14:sldIdLst>
             <p14:sldId id="261"/>
             <p14:sldId id="262"/>
           </p14:sldIdLst>
         </p14:section>
-        <p14:section name="Teach" id="{0b5f558a-b47b-9d45-8f5a-58b2d1a2119c}">
+        <p14:section name="Teach" id="{1d3ec25b-c4cf-0b74-a5bc-6f24021cf3dc}">
           <p14:sldIdLst>
             <p14:sldId id="263"/>
             <p14:sldId id="264"/>
@@ -155,19 +155,19 @@
             <p14:sldId id="266"/>
           </p14:sldIdLst>
         </p14:section>
-        <p14:section name="Routes" id="{24f75a18-b0c1-32dc-2332-e8f6d0bd6b33}">
+        <p14:section name="Routes" id="{50222f27-2331-e9f8-d8b1-0b3ff3f983da}">
           <p14:sldIdLst>
             <p14:sldId id="267"/>
             <p14:sldId id="268"/>
             <p14:sldId id="269"/>
           </p14:sldIdLst>
         </p14:section>
-        <p14:section name="Close" id="{1bc852af-d7a5-7ab3-3c6f-5f8881fafce0}">
+        <p14:section name="Close" id="{54e65119-44c0-5fc0-a35a-29528200162a}">
           <p14:sldIdLst>
             <p14:sldId id="270"/>
           </p14:sldIdLst>
         </p14:section>
-        <p14:section name="Answers" id="{8f1cf883-5566-10e0-21fd-450767102010}">
+        <p14:section name="Answers" id="{6e312f87-dd16-64be-ea08-9ebe5eca3b23}">
           <p14:sldIdLst>
             <p14:sldId id="271"/>
             <p14:sldId id="272"/>
@@ -1502,7 +1502,7 @@
               <a:rPr lang="en-US" dirty="0"/>
               <a:t>Do now — retrieval. Silent, no notes, no help: recall comes before any support. Give about four minutes.
 1. The image of an insect is 6 cm tall. The insect itself is 2 cm tall. Calculate the magnification.  →  3
-2. What is the unit of magnification?  →  A   It has no units
+2. What is the unit of magnification?  →  B   It has no units
 3. Magnification = image height ÷ ___ height.  →  object
 Circulate: who gets 3/3 (Stretch route), 2/3 (Core), 0–1 (Support)? Use this to route pupils later in the lesson.</a:t>
             </a:r>
@@ -1594,7 +1594,7 @@
               <a:rPr lang="en-US" dirty="0"/>
               <a:t>Answers — pupils mark their own in a different colour, then hands up for 3/3, 2/3, 1/3.
 1. 3. Magnification = image height ÷ object height = 6 ÷ 2 = 3. No units. Exact.
-2. A   It has no units. Magnification is a ratio of two lengths, so the units cancel.
+2. B   It has no units. Magnification is a ratio of two lengths, so the units cancel.
 3. object. Magnification = image height ÷ object height.
 Say the route each score points to: 3/3 Stretch, 2/3 Core, 0–1 Support. Pupils may choose to move up.</a:t>
             </a:r>
@@ -10247,7 +10247,7 @@
                 <a:ea typeface="Calibri" pitchFamily="34" charset="-122"/>
                 <a:cs typeface="Calibri" pitchFamily="34" charset="-120"/>
               </a:rPr>
-              <a:t>It has no units</a:t>
+              <a:t>m</a:t>
             </a:r>
             <a:endParaRPr lang="en-US" sz="2400" dirty="0"/>
           </a:p>
@@ -10284,7 +10284,7 @@
                 <a:ea typeface="Calibri" pitchFamily="34" charset="-122"/>
                 <a:cs typeface="Calibri" pitchFamily="34" charset="-120"/>
               </a:rPr>
-              <a:t>cm</a:t>
+              <a:t>It has no units</a:t>
             </a:r>
             <a:endParaRPr lang="en-US" sz="2400" dirty="0"/>
           </a:p>
@@ -10358,7 +10358,7 @@
                 <a:ea typeface="Calibri" pitchFamily="34" charset="-122"/>
                 <a:cs typeface="Calibri" pitchFamily="34" charset="-120"/>
               </a:rPr>
-              <a:t>m</a:t>
+              <a:t>cm</a:t>
             </a:r>
             <a:endParaRPr lang="en-US" sz="2400" dirty="0"/>
           </a:p>
@@ -11207,7 +11207,7 @@
                 <a:ea typeface="Calibri" pitchFamily="34" charset="-122"/>
                 <a:cs typeface="Calibri" pitchFamily="34" charset="-120"/>
               </a:rPr>
-              <a:t>A   It has no units</a:t>
+              <a:t>B   It has no units</a:t>
             </a:r>
             <a:endParaRPr lang="en-US" sz="2200" dirty="0"/>
           </a:p>

--- a/decks/triple-light/triple-light_ch5_magnification.pptx
+++ b/decks/triple-light/triple-light_ch5_magnification.pptx
@@ -124,30 +124,30 @@
   <p:extLst>
     <p:ext uri="{521415D9-36F7-43E2-AB2F-B90AF26B5E84}">
       <p14:sectionLst xmlns:p14="http://schemas.microsoft.com/office/powerpoint/2010/main">
-        <p14:section name="Opening" id="{36e092ba-130c-19e7-605e-f5b25056a7e4}">
+        <p14:section name="Opening" id="{fd3f12d6-f6ae-1444-f897-18fc48011418}">
           <p14:sldIdLst>
             <p14:sldId id="256"/>
           </p14:sldIdLst>
         </p14:section>
-        <p14:section name="Gate" id="{cc8c5b5f-7d60-d91b-eecb-c98c6fa24cc2}">
+        <p14:section name="Gate" id="{e87615b8-2b68-2712-367e-24acbd7491da}">
           <p14:sldIdLst>
             <p14:sldId id="257"/>
             <p14:sldId id="258"/>
           </p14:sldIdLst>
         </p14:section>
-        <p14:section name="Pre-teach" id="{562d7c73-cdf0-27c8-b497-d993a429cd0a}">
+        <p14:section name="Pre-teach" id="{799bf2c5-f553-fafd-eb55-6e28a6e7801a}">
           <p14:sldIdLst>
             <p14:sldId id="259"/>
             <p14:sldId id="260"/>
           </p14:sldIdLst>
         </p14:section>
-        <p14:section name="Read-along" id="{adccfe05-d1ae-5b6e-cf86-a653e3ea389d}">
+        <p14:section name="Read-along" id="{cf107e53-24ce-d3ec-ad97-fa7edb08c4db}">
           <p14:sldIdLst>
             <p14:sldId id="261"/>
             <p14:sldId id="262"/>
           </p14:sldIdLst>
         </p14:section>
-        <p14:section name="Teach" id="{1d3ec25b-c4cf-0b74-a5bc-6f24021cf3dc}">
+        <p14:section name="Teach" id="{8d3d1142-77af-2709-4312-1e2042581896}">
           <p14:sldIdLst>
             <p14:sldId id="263"/>
             <p14:sldId id="264"/>
@@ -155,19 +155,19 @@
             <p14:sldId id="266"/>
           </p14:sldIdLst>
         </p14:section>
-        <p14:section name="Routes" id="{50222f27-2331-e9f8-d8b1-0b3ff3f983da}">
+        <p14:section name="Routes" id="{7f0eb3ea-ea75-bea1-acbf-d61c047f9caf}">
           <p14:sldIdLst>
             <p14:sldId id="267"/>
             <p14:sldId id="268"/>
             <p14:sldId id="269"/>
           </p14:sldIdLst>
         </p14:section>
-        <p14:section name="Close" id="{54e65119-44c0-5fc0-a35a-29528200162a}">
+        <p14:section name="Close" id="{219550aa-ad69-d088-7899-e28002a47f1f}">
           <p14:sldIdLst>
             <p14:sldId id="270"/>
           </p14:sldIdLst>
         </p14:section>
-        <p14:section name="Answers" id="{6e312f87-dd16-64be-ea08-9ebe5eca3b23}">
+        <p14:section name="Answers" id="{6b5a8866-b8fa-c52b-11f4-894b974b08a4}">
           <p14:sldIdLst>
             <p14:sldId id="271"/>
             <p14:sldId id="272"/>
